--- a/pre-algebra/simplification-of-roots/Simplification of roots.pptx
+++ b/pre-algebra/simplification-of-roots/Simplification of roots.pptx
@@ -4842,7 +4842,29 @@
                   <a:srgbClr val="FFFF00"/>
                 </a:highlight>
               </a:rPr>
-              <a:t>property. _ </a:t>
+              <a:t>property</a:t>
+            </a:r>
+            <a:r>
+              <a:rPr lang="nl-NL" sz="2000" dirty="0">
+                <a:solidFill>
+                  <a:srgbClr val="FFFF00"/>
+                </a:solidFill>
+                <a:highlight>
+                  <a:srgbClr val="FFFF00"/>
+                </a:highlight>
+              </a:rPr>
+              <a:t>. _</a:t>
+            </a:r>
+            <a:r>
+              <a:rPr lang="nl-NL" sz="2000" dirty="0">
+                <a:solidFill>
+                  <a:schemeClr val="bg1"/>
+                </a:solidFill>
+                <a:highlight>
+                  <a:srgbClr val="FFFF00"/>
+                </a:highlight>
+              </a:rPr>
+              <a:t> </a:t>
             </a:r>
           </a:p>
         </p:txBody>
@@ -4884,7 +4906,18 @@
                   <a:srgbClr val="FFFF00"/>
                 </a:highlight>
               </a:rPr>
-              <a:t>property..</a:t>
+              <a:t>property</a:t>
+            </a:r>
+            <a:r>
+              <a:rPr lang="nl-NL" sz="2000" dirty="0">
+                <a:solidFill>
+                  <a:srgbClr val="FFFF00"/>
+                </a:solidFill>
+                <a:highlight>
+                  <a:srgbClr val="FFFF00"/>
+                </a:highlight>
+              </a:rPr>
+              <a:t>..</a:t>
             </a:r>
           </a:p>
         </p:txBody>
@@ -4926,7 +4959,18 @@
                   <a:srgbClr val="FFFF00"/>
                 </a:highlight>
               </a:rPr>
-              <a:t>property___:</a:t>
+              <a:t>property</a:t>
+            </a:r>
+            <a:r>
+              <a:rPr lang="nl-NL" sz="2000" dirty="0">
+                <a:solidFill>
+                  <a:srgbClr val="FFFF00"/>
+                </a:solidFill>
+                <a:highlight>
+                  <a:srgbClr val="FFFF00"/>
+                </a:highlight>
+              </a:rPr>
+              <a:t>___:</a:t>
             </a:r>
           </a:p>
         </p:txBody>
@@ -4998,12 +5042,51 @@
           </a:prstGeom>
         </p:spPr>
       </p:pic>
+      <p:sp>
+        <p:nvSpPr>
+          <p:cNvPr id="6" name="Tekstvak 5">
+            <a:extLst>
+              <a:ext uri="{FF2B5EF4-FFF2-40B4-BE49-F238E27FC236}">
+                <a16:creationId xmlns:a16="http://schemas.microsoft.com/office/drawing/2014/main" id="{49EB6275-7155-31AC-A2D9-27263AE51D07}"/>
+              </a:ext>
+            </a:extLst>
+          </p:cNvPr>
+          <p:cNvSpPr txBox="1"/>
+          <p:nvPr/>
+        </p:nvSpPr>
+        <p:spPr>
+          <a:xfrm>
+            <a:off x="685800" y="4447686"/>
+            <a:ext cx="677333" cy="400110"/>
+          </a:xfrm>
+          <a:prstGeom prst="rect">
+            <a:avLst/>
+          </a:prstGeom>
+          <a:noFill/>
+        </p:spPr>
+        <p:txBody>
+          <a:bodyPr wrap="square" rtlCol="0">
+            <a:spAutoFit/>
+          </a:bodyPr>
+          <a:lstStyle/>
+          <a:p>
+            <a:r>
+              <a:rPr lang="nl-NL" sz="2000" dirty="0">
+                <a:solidFill>
+                  <a:srgbClr val="FF0000"/>
+                </a:solidFill>
+              </a:rPr>
+              <a:t>-----</a:t>
+            </a:r>
+          </a:p>
+        </p:txBody>
+      </p:sp>
       <p:pic>
         <p:nvPicPr>
-          <p:cNvPr id="5" name="Afbeelding 4">
-            <a:extLst>
-              <a:ext uri="{FF2B5EF4-FFF2-40B4-BE49-F238E27FC236}">
-                <a16:creationId xmlns:a16="http://schemas.microsoft.com/office/drawing/2014/main" id="{4C9821DE-90DA-12B6-D872-AEEC6734B952}"/>
+          <p:cNvPr id="8" name="Afbeelding 7">
+            <a:extLst>
+              <a:ext uri="{FF2B5EF4-FFF2-40B4-BE49-F238E27FC236}">
+                <a16:creationId xmlns:a16="http://schemas.microsoft.com/office/drawing/2014/main" id="{73A36D8E-F345-1DC8-D8BA-65BEE114F027}"/>
               </a:ext>
             </a:extLst>
           </p:cNvPr>
@@ -5020,7 +5103,7 @@
         </p:blipFill>
         <p:spPr>
           <a:xfrm>
-            <a:off x="3356118" y="4744019"/>
+            <a:off x="3347651" y="4752486"/>
             <a:ext cx="1585097" cy="536494"/>
           </a:xfrm>
           <a:prstGeom prst="rect">
@@ -5028,45 +5111,6 @@
           </a:prstGeom>
         </p:spPr>
       </p:pic>
-      <p:sp>
-        <p:nvSpPr>
-          <p:cNvPr id="6" name="Tekstvak 5">
-            <a:extLst>
-              <a:ext uri="{FF2B5EF4-FFF2-40B4-BE49-F238E27FC236}">
-                <a16:creationId xmlns:a16="http://schemas.microsoft.com/office/drawing/2014/main" id="{49EB6275-7155-31AC-A2D9-27263AE51D07}"/>
-              </a:ext>
-            </a:extLst>
-          </p:cNvPr>
-          <p:cNvSpPr txBox="1"/>
-          <p:nvPr/>
-        </p:nvSpPr>
-        <p:spPr>
-          <a:xfrm>
-            <a:off x="685800" y="4447686"/>
-            <a:ext cx="677333" cy="400110"/>
-          </a:xfrm>
-          <a:prstGeom prst="rect">
-            <a:avLst/>
-          </a:prstGeom>
-          <a:noFill/>
-        </p:spPr>
-        <p:txBody>
-          <a:bodyPr wrap="square" rtlCol="0">
-            <a:spAutoFit/>
-          </a:bodyPr>
-          <a:lstStyle/>
-          <a:p>
-            <a:r>
-              <a:rPr lang="nl-NL" sz="2000" dirty="0">
-                <a:solidFill>
-                  <a:srgbClr val="FF0000"/>
-                </a:solidFill>
-              </a:rPr>
-              <a:t>-----</a:t>
-            </a:r>
-          </a:p>
-        </p:txBody>
-      </p:sp>
     </p:spTree>
     <p:extLst>
       <p:ext uri="{BB962C8B-B14F-4D97-AF65-F5344CB8AC3E}">
